--- a/dist/초3/수학/도형과측정/초3_수학_도형과측정_06_들이.pptx
+++ b/dist/초3/수학/도형과측정/초3_수학_도형과측정_06_들이.pptx
@@ -122,13 +122,13 @@
   <p:extLst>
     <p:ext uri="{521415D9-36F7-43E2-AB2F-B90AF26B5E84}">
       <p14:sectionLst xmlns:p14="http://schemas.microsoft.com/office/powerpoint/2010/main">
-        <p14:section name="도입" id="{bfe0f102-a9fa-5dc4-8059-8ff46847d4cd}">
+        <p14:section name="도입" id="{80ea3a3e-ec4d-7742-3f7c-5fd1278562f3}">
           <p14:sldIdLst>
             <p14:sldId id="256"/>
             <p14:sldId id="257"/>
           </p14:sldIdLst>
         </p14:section>
-        <p14:section name="개념" id="{e152c450-bc0f-e9f8-b90f-b38e98228e36}">
+        <p14:section name="개념" id="{cbbb63f5-6ae7-50ad-289b-b795480ec705}">
           <p14:sldIdLst>
             <p14:sldId id="258"/>
             <p14:sldId id="259"/>
@@ -138,32 +138,32 @@
             <p14:sldId id="265"/>
           </p14:sldIdLst>
         </p14:section>
-        <p14:section name="연습" id="{dd633a37-8cfa-7b59-9cc9-4f4be42a450d}">
+        <p14:section name="연습" id="{d13f8f98-ef3f-9626-b4c0-3a46c08e1318}">
           <p14:sldIdLst>
             <p14:sldId id="262"/>
             <p14:sldId id="263"/>
             <p14:sldId id="266"/>
           </p14:sldIdLst>
         </p14:section>
-        <p14:section name="개념" id="{1635bf06-ad6f-63db-7777-666689cafa9d}">
+        <p14:section name="개념" id="{22776b84-6ee9-6a10-0599-feda588e0afb}">
           <p14:sldIdLst/>
         </p14:section>
-        <p14:section name="연습" id="{b95621a7-7df5-0244-f8a7-4a69a31e7cfd}">
+        <p14:section name="연습" id="{ae8258f2-3ba4-aa69-4b99-d59ae6741156}">
           <p14:sldIdLst/>
         </p14:section>
-        <p14:section name="확인" id="{e8ede13a-251b-9fe5-e4b7-823e0a118059}">
+        <p14:section name="확인" id="{f3ec3f13-ab57-9b2e-97ba-f18c27f0f526}">
           <p14:sldIdLst>
             <p14:sldId id="267"/>
             <p14:sldId id="268"/>
             <p14:sldId id="269"/>
           </p14:sldIdLst>
         </p14:section>
-        <p14:section name="정리" id="{d0e30ca3-9621-212d-ec02-3c2ff9065c33}">
+        <p14:section name="정리" id="{1ed73bde-a238-1765-9f7e-b5911150d544}">
           <p14:sldIdLst>
             <p14:sldId id="270"/>
           </p14:sldIdLst>
         </p14:section>
-        <p14:section name="보충" id="{493f3816-0de9-bbb8-7261-c857127514a4}">
+        <p14:section name="보충" id="{57cd1f1d-2004-7cf0-7dae-c3e15a3294da}">
           <p14:sldIdLst>
             <p14:sldId id="271"/>
           </p14:sldIdLst>
@@ -3587,8 +3587,8 @@
         </p:nvSpPr>
         <p:spPr>
           <a:xfrm>
-            <a:off x="10512014" y="2059577"/>
-            <a:ext cx="1185672" cy="381000"/>
+            <a:off x="10476962" y="2059577"/>
+            <a:ext cx="1255776" cy="381000"/>
           </a:xfrm>
           <a:prstGeom prst="rect">
             <a:avLst/>
@@ -3604,7 +3604,7 @@
               <a:buNone/>
             </a:pPr>
             <a:r>
-              <a:rPr lang="ko-KR" altLang="en-US" sz="2400" b="1" dirty="0">
+              <a:rPr lang="en-US" altLang="ko-KR" sz="2400" b="1" dirty="0">
                 <a:solidFill>
                   <a:srgbClr val="1F2937"/>
                 </a:solidFill>
@@ -3626,8 +3626,8 @@
         </p:nvSpPr>
         <p:spPr>
           <a:xfrm>
-            <a:off x="10514227" y="834934"/>
-            <a:ext cx="627888" cy="381000"/>
+            <a:off x="10526419" y="834934"/>
+            <a:ext cx="603504" cy="381000"/>
           </a:xfrm>
           <a:prstGeom prst="rect">
             <a:avLst/>
@@ -3643,7 +3643,7 @@
               <a:buNone/>
             </a:pPr>
             <a:r>
-              <a:rPr lang="ko-KR" altLang="en-US" sz="2400" b="1" dirty="0">
+              <a:rPr lang="en-US" altLang="ko-KR" sz="2400" b="1" dirty="0">
                 <a:solidFill>
                   <a:srgbClr val="1F2937"/>
                 </a:solidFill>
@@ -5212,7 +5212,7 @@
               <a:buNone/>
             </a:pPr>
             <a:r>
-              <a:rPr lang="ko-KR" altLang="en-US" sz="3000" dirty="0">
+              <a:rPr lang="en-US" altLang="ko-KR" sz="3000" dirty="0">
                 <a:solidFill>
                   <a:srgbClr val="1F2937"/>
                 </a:solidFill>
@@ -6515,7 +6515,7 @@
               <a:buNone/>
             </a:pPr>
             <a:r>
-              <a:rPr lang="ko-KR" altLang="en-US" sz="3000" b="1" dirty="0">
+              <a:rPr lang="en-US" altLang="ko-KR" sz="3000" b="1" dirty="0">
                 <a:solidFill>
                   <a:srgbClr val="1F2937"/>
                 </a:solidFill>
@@ -6532,7 +6532,7 @@
               <a:buNone/>
             </a:pPr>
             <a:r>
-              <a:rPr lang="ko-KR" altLang="en-US" sz="3000" b="1" dirty="0">
+              <a:rPr lang="en-US" altLang="ko-KR" sz="3000" b="1" dirty="0">
                 <a:solidFill>
                   <a:srgbClr val="1F2937"/>
                 </a:solidFill>
@@ -6618,7 +6618,7 @@
               <a:buNone/>
             </a:pPr>
             <a:r>
-              <a:rPr lang="ko-KR" altLang="en-US" sz="3000" b="1" dirty="0">
+              <a:rPr lang="en-US" altLang="ko-KR" sz="3000" b="1" dirty="0">
                 <a:solidFill>
                   <a:srgbClr val="1F2937"/>
                 </a:solidFill>
@@ -6635,7 +6635,7 @@
               <a:buNone/>
             </a:pPr>
             <a:r>
-              <a:rPr lang="ko-KR" altLang="en-US" sz="3000" b="1" dirty="0">
+              <a:rPr lang="en-US" altLang="ko-KR" sz="3000" b="1" dirty="0">
                 <a:solidFill>
                   <a:srgbClr val="1F2937"/>
                 </a:solidFill>
@@ -6721,7 +6721,7 @@
               <a:buNone/>
             </a:pPr>
             <a:r>
-              <a:rPr lang="ko-KR" altLang="en-US" sz="3000" b="1" dirty="0">
+              <a:rPr lang="en-US" altLang="ko-KR" sz="3000" b="1" dirty="0">
                 <a:solidFill>
                   <a:srgbClr val="1F2937"/>
                 </a:solidFill>
@@ -6738,7 +6738,7 @@
               <a:buNone/>
             </a:pPr>
             <a:r>
-              <a:rPr lang="ko-KR" altLang="en-US" sz="3000" b="1" dirty="0">
+              <a:rPr lang="en-US" altLang="ko-KR" sz="3000" b="1" dirty="0">
                 <a:solidFill>
                   <a:srgbClr val="1F2937"/>
                 </a:solidFill>
@@ -6977,7 +6977,7 @@
               <a:buNone/>
             </a:pPr>
             <a:r>
-              <a:rPr lang="ko-KR" altLang="en-US" sz="3000" b="1" dirty="0">
+              <a:rPr lang="en-US" altLang="ko-KR" sz="3000" b="1" dirty="0">
                 <a:solidFill>
                   <a:srgbClr val="1F2937"/>
                 </a:solidFill>
@@ -7063,7 +7063,7 @@
               <a:buNone/>
             </a:pPr>
             <a:r>
-              <a:rPr lang="ko-KR" altLang="en-US" sz="3000" b="1" dirty="0">
+              <a:rPr lang="en-US" altLang="ko-KR" sz="3000" b="1" dirty="0">
                 <a:solidFill>
                   <a:srgbClr val="1F2937"/>
                 </a:solidFill>
@@ -7149,7 +7149,7 @@
               <a:buNone/>
             </a:pPr>
             <a:r>
-              <a:rPr lang="ko-KR" altLang="en-US" sz="3000" b="1" dirty="0">
+              <a:rPr lang="en-US" altLang="ko-KR" sz="3000" b="1" dirty="0">
                 <a:solidFill>
                   <a:srgbClr val="1F2937"/>
                 </a:solidFill>
@@ -7166,7 +7166,7 @@
               <a:buNone/>
             </a:pPr>
             <a:r>
-              <a:rPr lang="ko-KR" altLang="en-US" sz="3000" b="1" dirty="0">
+              <a:rPr lang="en-US" altLang="ko-KR" sz="3000" b="1" dirty="0">
                 <a:solidFill>
                   <a:srgbClr val="1F2937"/>
                 </a:solidFill>
@@ -7252,7 +7252,7 @@
               <a:buNone/>
             </a:pPr>
             <a:r>
-              <a:rPr lang="ko-KR" altLang="en-US" sz="3000" b="1" dirty="0">
+              <a:rPr lang="en-US" altLang="ko-KR" sz="3000" b="1" dirty="0">
                 <a:solidFill>
                   <a:srgbClr val="1F2937"/>
                 </a:solidFill>
@@ -7269,7 +7269,7 @@
               <a:buNone/>
             </a:pPr>
             <a:r>
-              <a:rPr lang="ko-KR" altLang="en-US" sz="3000" b="1" dirty="0">
+              <a:rPr lang="en-US" altLang="ko-KR" sz="3000" b="1" dirty="0">
                 <a:solidFill>
                   <a:srgbClr val="1F2937"/>
                 </a:solidFill>
@@ -7538,7 +7538,7 @@
               <a:buNone/>
             </a:pPr>
             <a:r>
-              <a:rPr lang="ko-KR" altLang="en-US" sz="3000" dirty="0">
+              <a:rPr lang="en-US" altLang="ko-KR" sz="3000" dirty="0">
                 <a:solidFill>
                   <a:srgbClr val="1F2937"/>
                 </a:solidFill>
@@ -7616,7 +7616,7 @@
               <a:buNone/>
             </a:pPr>
             <a:r>
-              <a:rPr lang="ko-KR" altLang="en-US" sz="3000" dirty="0">
+              <a:rPr lang="en-US" altLang="ko-KR" sz="3000" dirty="0">
                 <a:solidFill>
                   <a:srgbClr val="1F2937"/>
                 </a:solidFill>
@@ -7694,7 +7694,7 @@
               <a:buNone/>
             </a:pPr>
             <a:r>
-              <a:rPr lang="ko-KR" altLang="en-US" sz="3000" dirty="0">
+              <a:rPr lang="en-US" altLang="ko-KR" sz="3000" dirty="0">
                 <a:solidFill>
                   <a:srgbClr val="1F2937"/>
                 </a:solidFill>
@@ -7772,7 +7772,7 @@
               <a:buNone/>
             </a:pPr>
             <a:r>
-              <a:rPr lang="ko-KR" altLang="en-US" sz="3000" dirty="0">
+              <a:rPr lang="en-US" altLang="ko-KR" sz="3000" dirty="0">
                 <a:solidFill>
                   <a:srgbClr val="1F2937"/>
                 </a:solidFill>
@@ -7897,7 +7897,7 @@
               <a:buNone/>
             </a:pPr>
             <a:r>
-              <a:rPr lang="ko-KR" altLang="en-US" sz="3000" dirty="0">
+              <a:rPr lang="en-US" altLang="ko-KR" sz="3000" dirty="0">
                 <a:solidFill>
                   <a:srgbClr val="1F2937"/>
                 </a:solidFill>
@@ -7975,7 +7975,7 @@
               <a:buNone/>
             </a:pPr>
             <a:r>
-              <a:rPr lang="ko-KR" altLang="en-US" sz="3000" dirty="0">
+              <a:rPr lang="en-US" altLang="ko-KR" sz="3000" dirty="0">
                 <a:solidFill>
                   <a:srgbClr val="1F2937"/>
                 </a:solidFill>
@@ -8771,7 +8771,7 @@
               <a:buNone/>
             </a:pPr>
             <a:r>
-              <a:rPr lang="ko-KR" altLang="en-US" sz="2400" b="1" dirty="0">
+              <a:rPr lang="en-US" altLang="ko-KR" sz="2400" b="1" dirty="0">
                 <a:solidFill>
                   <a:srgbClr val="FFFFFF"/>
                 </a:solidFill>
@@ -8905,7 +8905,7 @@
               <a:buNone/>
             </a:pPr>
             <a:r>
-              <a:rPr lang="ko-KR" altLang="en-US" sz="2400" dirty="0">
+              <a:rPr lang="en-US" altLang="ko-KR" sz="2400" dirty="0">
                 <a:solidFill>
                   <a:srgbClr val="FFFFFF"/>
                 </a:solidFill>
@@ -9861,7 +9861,7 @@
               <a:buNone/>
             </a:pPr>
             <a:r>
-              <a:rPr lang="ko-KR" altLang="en-US" sz="3400" b="1" dirty="0">
+              <a:rPr lang="en-US" altLang="ko-KR" sz="3400" b="1" dirty="0">
                 <a:solidFill>
                   <a:srgbClr val="1F2937"/>
                 </a:solidFill>
@@ -10169,7 +10169,7 @@
               <a:buNone/>
             </a:pPr>
             <a:r>
-              <a:rPr lang="ko-KR" altLang="en-US" sz="3000" b="1" dirty="0">
+              <a:rPr lang="en-US" altLang="ko-KR" sz="3000" b="1" dirty="0">
                 <a:solidFill>
                   <a:srgbClr val="1F2937"/>
                 </a:solidFill>
@@ -10228,7 +10228,7 @@
               <a:buNone/>
             </a:pPr>
             <a:r>
-              <a:rPr lang="ko-KR" altLang="en-US" sz="5400" b="1" dirty="0">
+              <a:rPr lang="en-US" altLang="ko-KR" sz="5400" b="1" dirty="0">
                 <a:solidFill>
                   <a:srgbClr val="1F2937"/>
                 </a:solidFill>
@@ -10306,7 +10306,7 @@
               <a:buNone/>
             </a:pPr>
             <a:r>
-              <a:rPr lang="ko-KR" altLang="en-US" sz="5400" b="1" dirty="0">
+              <a:rPr lang="en-US" altLang="ko-KR" sz="5400" b="1" dirty="0">
                 <a:solidFill>
                   <a:srgbClr val="1F2937"/>
                 </a:solidFill>
@@ -10528,7 +10528,7 @@
               <a:buNone/>
             </a:pPr>
             <a:r>
-              <a:rPr lang="ko-KR" altLang="en-US" sz="3000" b="1" dirty="0">
+              <a:rPr lang="en-US" altLang="ko-KR" sz="3000" b="1" dirty="0">
                 <a:solidFill>
                   <a:srgbClr val="1F2937"/>
                 </a:solidFill>
@@ -11119,8 +11119,8 @@
         </p:nvSpPr>
         <p:spPr>
           <a:xfrm>
-            <a:off x="3530636" y="2937726"/>
-            <a:ext cx="627888" cy="381000"/>
+            <a:off x="3542828" y="2937726"/>
+            <a:ext cx="603504" cy="381000"/>
           </a:xfrm>
           <a:prstGeom prst="rect">
             <a:avLst/>
@@ -11136,7 +11136,7 @@
               <a:buNone/>
             </a:pPr>
             <a:r>
-              <a:rPr lang="ko-KR" altLang="en-US" sz="2400" b="1" dirty="0">
+              <a:rPr lang="en-US" altLang="ko-KR" sz="2400" b="1" dirty="0">
                 <a:solidFill>
                   <a:srgbClr val="1F2937"/>
                 </a:solidFill>
@@ -11158,8 +11158,8 @@
         </p:nvSpPr>
         <p:spPr>
           <a:xfrm>
-            <a:off x="3530636" y="1410131"/>
-            <a:ext cx="627888" cy="381000"/>
+            <a:off x="3542828" y="1410131"/>
+            <a:ext cx="603504" cy="381000"/>
           </a:xfrm>
           <a:prstGeom prst="rect">
             <a:avLst/>
@@ -11175,7 +11175,7 @@
               <a:buNone/>
             </a:pPr>
             <a:r>
-              <a:rPr lang="ko-KR" altLang="en-US" sz="2400" b="1" dirty="0">
+              <a:rPr lang="en-US" altLang="ko-KR" sz="2400" b="1" dirty="0">
                 <a:solidFill>
                   <a:srgbClr val="1F2937"/>
                 </a:solidFill>
@@ -11604,7 +11604,7 @@
               <a:buNone/>
             </a:pPr>
             <a:r>
-              <a:rPr lang="ko-KR" altLang="en-US" sz="3000" dirty="0">
+              <a:rPr lang="en-US" altLang="ko-KR" sz="3000" dirty="0">
                 <a:solidFill>
                   <a:srgbClr val="1F2937"/>
                 </a:solidFill>
@@ -11966,8 +11966,8 @@
         </p:nvSpPr>
         <p:spPr>
           <a:xfrm>
-            <a:off x="3925824" y="3441802"/>
-            <a:ext cx="914400" cy="396240"/>
+            <a:off x="3889248" y="3441802"/>
+            <a:ext cx="987552" cy="396240"/>
           </a:xfrm>
           <a:prstGeom prst="rect">
             <a:avLst/>
@@ -12120,8 +12120,8 @@
         </p:nvSpPr>
         <p:spPr>
           <a:xfrm>
-            <a:off x="7348728" y="3441802"/>
-            <a:ext cx="914400" cy="396240"/>
+            <a:off x="7312152" y="3441802"/>
+            <a:ext cx="987552" cy="396240"/>
           </a:xfrm>
           <a:prstGeom prst="rect">
             <a:avLst/>
@@ -12274,8 +12274,8 @@
         </p:nvSpPr>
         <p:spPr>
           <a:xfrm>
-            <a:off x="10771632" y="3441802"/>
-            <a:ext cx="914400" cy="396240"/>
+            <a:off x="10735056" y="3441802"/>
+            <a:ext cx="987552" cy="396240"/>
           </a:xfrm>
           <a:prstGeom prst="rect">
             <a:avLst/>
@@ -12402,7 +12402,7 @@
               <a:buNone/>
             </a:pPr>
             <a:r>
-              <a:rPr lang="ko-KR" altLang="en-US" sz="2400" b="1" dirty="0">
+              <a:rPr lang="en-US" altLang="ko-KR" sz="2400" b="1" dirty="0">
                 <a:solidFill>
                   <a:srgbClr val="3D5A80"/>
                 </a:solidFill>
@@ -12488,7 +12488,7 @@
               <a:buNone/>
             </a:pPr>
             <a:r>
-              <a:rPr lang="ko-KR" altLang="en-US" sz="2400" b="1" dirty="0">
+              <a:rPr lang="en-US" altLang="ko-KR" sz="2400" b="1" dirty="0">
                 <a:solidFill>
                   <a:srgbClr val="3D5A80"/>
                 </a:solidFill>
@@ -12574,7 +12574,7 @@
               <a:buNone/>
             </a:pPr>
             <a:r>
-              <a:rPr lang="ko-KR" altLang="en-US" sz="2400" b="1" dirty="0">
+              <a:rPr lang="en-US" altLang="ko-KR" sz="2400" b="1" dirty="0">
                 <a:solidFill>
                   <a:srgbClr val="3D5A80"/>
                 </a:solidFill>
@@ -13853,7 +13853,7 @@
               <a:buNone/>
             </a:pPr>
             <a:r>
-              <a:rPr lang="ko-KR" altLang="en-US" sz="3000" b="1" dirty="0">
+              <a:rPr lang="en-US" altLang="ko-KR" sz="3000" b="1" dirty="0">
                 <a:solidFill>
                   <a:srgbClr val="1F2937"/>
                 </a:solidFill>
@@ -13939,7 +13939,7 @@
               <a:buNone/>
             </a:pPr>
             <a:r>
-              <a:rPr lang="ko-KR" altLang="en-US" sz="3000" b="1" dirty="0">
+              <a:rPr lang="en-US" altLang="ko-KR" sz="3000" b="1" dirty="0">
                 <a:solidFill>
                   <a:srgbClr val="1F2937"/>
                 </a:solidFill>
@@ -14535,7 +14535,7 @@
               <a:buNone/>
             </a:pPr>
             <a:r>
-              <a:rPr lang="ko-KR" altLang="en-US" sz="3000" dirty="0">
+              <a:rPr lang="en-US" altLang="ko-KR" sz="3000" dirty="0">
                 <a:solidFill>
                   <a:srgbClr val="1F2937"/>
                 </a:solidFill>
@@ -14552,7 +14552,7 @@
               <a:buNone/>
             </a:pPr>
             <a:r>
-              <a:rPr lang="ko-KR" altLang="en-US" sz="3000" dirty="0">
+              <a:rPr lang="en-US" altLang="ko-KR" sz="3000" dirty="0">
                 <a:solidFill>
                   <a:srgbClr val="1F2937"/>
                 </a:solidFill>
@@ -15864,7 +15864,7 @@
               <a:buNone/>
             </a:pPr>
             <a:r>
-              <a:rPr lang="ko-KR" altLang="en-US" sz="3000" dirty="0">
+              <a:rPr lang="en-US" altLang="ko-KR" sz="3000" dirty="0">
                 <a:solidFill>
                   <a:srgbClr val="1F2937"/>
                 </a:solidFill>
@@ -15948,7 +15948,7 @@
               <a:buNone/>
             </a:pPr>
             <a:r>
-              <a:rPr lang="ko-KR" altLang="en-US" sz="3000" dirty="0">
+              <a:rPr lang="en-US" altLang="ko-KR" sz="3000" dirty="0">
                 <a:solidFill>
                   <a:srgbClr val="1F2937"/>
                 </a:solidFill>
@@ -16049,7 +16049,7 @@
               <a:buNone/>
             </a:pPr>
             <a:r>
-              <a:rPr lang="ko-KR" altLang="en-US" sz="3000" dirty="0">
+              <a:rPr lang="en-US" altLang="ko-KR" sz="3000" dirty="0">
                 <a:solidFill>
                   <a:srgbClr val="1F2937"/>
                 </a:solidFill>
